--- a/assets/documents/26-udenar-big-data/project-presentation-template.pptx
+++ b/assets/documents/26-udenar-big-data/project-presentation-template.pptx
@@ -3550,7 +3550,7 @@
               <a:defRPr sz="1800"/>
             </a:pPr>
             <a:r>
-              <a:t>Retos del grupo, reflexión breve, recomendación. Sin diapositiva final solo de ética.</a:t>
+              <a:t>Retos del grupo, reflexión breve, recomendación.</a:t>
             </a:r>
           </a:p>
         </p:txBody>

--- a/assets/documents/26-udenar-big-data/project-presentation-template.pptx
+++ b/assets/documents/26-udenar-big-data/project-presentation-template.pptx
@@ -3470,7 +3470,7 @@
               <a:defRPr sz="1800"/>
             </a:pPr>
             <a:r>
-              <a:t>Respuesta a la pregunta de decisión; cómo cumplen los requisitos (incl. éticos).</a:t>
+              <a:t>Respuesta a la pregunta de decisión; demo en vivo (tablero, pipeline o celdas clave).</a:t>
             </a:r>
           </a:p>
         </p:txBody>
